--- a/pm-system/docs/POWERAPPS_LICENCE_CASE.pptx
+++ b/pm-system/docs/POWERAPPS_LICENCE_CASE.pptx
@@ -295,10 +295,10 @@
               <c:numCache>
                 <c:ptCount val="2"/>
                 <c:pt idx="0">
-                  <c:v>34.4</c:v>
+                  <c:v>28.1</c:v>
                 </c:pt>
                 <c:pt idx="1">
-                  <c:v>265.1</c:v>
+                  <c:v>271.4</c:v>
                 </c:pt>
               </c:numCache>
             </c:numRef>
@@ -445,22 +445,22 @@
                     <c:v>Curing / Autoclave</c:v>
                   </c:pt>
                   <c:pt idx="1">
-                    <c:v>Testing &amp; Calibration</c:v>
+                    <c:v>Cap Fitting</c:v>
                   </c:pt>
                   <c:pt idx="2">
-                    <c:v>Cap Fitting</c:v>
+                    <c:v>Testing &amp; Calibration</c:v>
                   </c:pt>
                   <c:pt idx="3">
                     <c:v>Assembly NH</c:v>
                   </c:pt>
                   <c:pt idx="4">
-                    <c:v>Element Welding</c:v>
+                    <c:v>Sand Filling</c:v>
                   </c:pt>
                   <c:pt idx="5">
-                    <c:v>Sand Filling</c:v>
+                    <c:v>Element Punching</c:v>
                   </c:pt>
                   <c:pt idx="6">
-                    <c:v>Element Punching</c:v>
+                    <c:v>Element Welding</c:v>
                   </c:pt>
                   <c:pt idx="7">
                     <c:v>Marking &amp; Packing</c:v>
@@ -479,19 +479,19 @@
                   <c:v>10.2</c:v>
                 </c:pt>
                 <c:pt idx="1">
-                  <c:v>9</c:v>
+                  <c:v>8.4</c:v>
                 </c:pt>
                 <c:pt idx="2">
-                  <c:v>8.4</c:v>
+                  <c:v>4.9</c:v>
                 </c:pt>
                 <c:pt idx="3">
                   <c:v>3</c:v>
                 </c:pt>
                 <c:pt idx="4">
-                  <c:v>2.1</c:v>
+                  <c:v>1.6</c:v>
                 </c:pt>
                 <c:pt idx="5">
-                  <c:v>1.6</c:v>
+                  <c:v>0</c:v>
                 </c:pt>
                 <c:pt idx="6">
                   <c:v>0</c:v>
@@ -1307,7 +1307,7 @@
           <a:p>
             <a:r>
               <a:rPr lang="en-US" dirty="0"/>
-              <a:t>This is the slide that carries the argument. 34.4 hours is measured from our own data, not estimated.</a:t>
+              <a:t>This is the slide that carries the argument. 28.1 hours is measured from our own data, not estimated. If asked why it is not the 34.4 quoted earlier: a PM is now dated from its own machine scans rather than a stored column, and docs/ASSUMPTIONS.md section 9.1 shows the working.</a:t>
             </a:r>
             <a:endParaRPr lang="en-US" dirty="0"/>
           </a:p>
@@ -2451,7 +2451,7 @@
                 <a:ea typeface="Cambria" pitchFamily="34" charset="-122"/>
                 <a:cs typeface="Cambria" pitchFamily="34" charset="-120"/>
               </a:rPr>
-              <a:t>16</a:t>
+              <a:t>14</a:t>
             </a:r>
             <a:endParaRPr lang="en-US" sz="4400" dirty="0"/>
           </a:p>
@@ -2597,7 +2597,7 @@
                 <a:ea typeface="Cambria" pitchFamily="34" charset="-122"/>
                 <a:cs typeface="Cambria" pitchFamily="34" charset="-120"/>
               </a:rPr>
-              <a:t>11</a:t>
+              <a:t>9</a:t>
             </a:r>
             <a:endParaRPr lang="en-US" sz="4400" dirty="0"/>
           </a:p>
@@ -2821,7 +2821,7 @@
                 <a:ea typeface="Calibri" pitchFamily="34" charset="-122"/>
                 <a:cs typeface="Calibri" pitchFamily="34" charset="-120"/>
               </a:rPr>
-              <a:t>94 measures, refreshed twice daily</a:t>
+              <a:t>85 measures, refreshed twice daily</a:t>
             </a:r>
             <a:endParaRPr lang="en-US" sz="1100" dirty="0"/>
           </a:p>
@@ -3937,7 +3937,7 @@
                 <a:ea typeface="Calibri" pitchFamily="34" charset="-122"/>
                 <a:cs typeface="Calibri" pitchFamily="34" charset="-120"/>
               </a:rPr>
-              <a:t>Current stock before he requests a part. Whether his machine is the last one in the cell. Forms shows a blank page and asks him to type.</a:t>
+              <a:t>Current stock and lead time before he fits a part. Whether his machine is the last one in the cell, and the counter is about to reset. Forms shows a blank page and asks him to type.</a:t>
             </a:r>
             <a:endParaRPr lang="en-US" sz="1200" dirty="0"/>
           </a:p>
@@ -4154,7 +4154,7 @@
                 <a:ea typeface="Cambria" pitchFamily="34" charset="-122"/>
                 <a:cs typeface="Cambria" pitchFamily="34" charset="-120"/>
               </a:rPr>
-              <a:t>34.4</a:t>
+              <a:t>28.1</a:t>
             </a:r>
             <a:endParaRPr lang="en-US" sz="6800" dirty="0"/>
           </a:p>
@@ -4264,7 +4264,7 @@
                 <a:ea typeface="Calibri" pitchFamily="34" charset="-122"/>
                 <a:cs typeface="Calibri" pitchFamily="34" charset="-120"/>
               </a:rPr>
-              <a:t>9 of 88 breakdowns. 11.5% of all downtime, on machines we had just maintained.</a:t>
+              <a:t>7 of 88 breakdowns. 9.4% of all downtime, on machines we had just maintained.</a:t>
             </a:r>
             <a:endParaRPr lang="en-US" sz="1250" dirty="0"/>
           </a:p>
@@ -4487,7 +4487,7 @@
                 <a:ea typeface="Calibri" pitchFamily="34" charset="-122"/>
                 <a:cs typeface="Calibri" pitchFamily="34" charset="-120"/>
               </a:rPr>
-              <a:t>Compliance is 89.6% and on-time is 48.8%. Neither number would tell you any of this. A PM programme can be fully compliant and still not be working.</a:t>
+              <a:t>Compliance is 89.6% and on-time is 65.1%. Neither number would tell you any of this. A PM programme can be fully compliant and still not be working.</a:t>
             </a:r>
             <a:endParaRPr lang="en-US" sz="1350" dirty="0"/>
           </a:p>
@@ -4730,7 +4730,7 @@
                 <a:ea typeface="Calibri" pitchFamily="34" charset="-122"/>
                 <a:cs typeface="Calibri" pitchFamily="34" charset="-120"/>
               </a:rPr>
-              <a:t>carry 30.6 of the 34.4 hours</a:t>
+              <a:t>carry 26.5 of the 28.1 hours</a:t>
             </a:r>
             <a:endParaRPr lang="en-US" sz="1300" dirty="0"/>
           </a:p>
@@ -4964,7 +4964,7 @@
                 <a:ea typeface="Calibri" pitchFamily="34" charset="-122"/>
                 <a:cs typeface="Calibri" pitchFamily="34" charset="-120"/>
               </a:rPr>
-              <a:t>Two cells lost nothing to post-PM breakdowns in twelve months. Whatever they do differently is worth copying either way.</a:t>
+              <a:t>Three cells lost nothing to post-PM breakdowns in twelve months. Whatever they do differently is worth copying either way.</a:t>
             </a:r>
             <a:endParaRPr lang="en-US" sz="900" dirty="0"/>
           </a:p>
@@ -5545,7 +5545,7 @@
                 <a:ea typeface="Calibri" pitchFamily="34" charset="-122"/>
                 <a:cs typeface="Calibri" pitchFamily="34" charset="-120"/>
               </a:rPr>
-              <a:t>The lists, the eleven flows and the dashboard are unchanged. The app is an alternative front end over the same data - which is why Forms stays available as the fallback.</a:t>
+              <a:t>The lists, the nine flows and the dashboard are unchanged. The app is an alternative front end over the same data - which is why Forms stays available as the fallback.</a:t>
             </a:r>
             <a:endParaRPr lang="en-US" sz="1250" dirty="0"/>
           </a:p>
@@ -7620,7 +7620,7 @@
                 <a:ea typeface="Calibri" pitchFamily="34" charset="-122"/>
                 <a:cs typeface="Calibri" pitchFamily="34" charset="-120"/>
               </a:rPr>
-              <a:t>Read a row: at ₹1,500 per user per month and ₹10,000 an hour of downtime, the licence pays for itself if it prevents 14.4 hours a year — 42% of the 34.4 hours currently lost to breakdowns that follow a PM.</a:t>
+              <a:t>Read a row: at ₹1,500 per user per month and ₹10,000 an hour of downtime, the licence pays for itself if it prevents 14.4 hours a year — 51% of the 28.1 hours currently lost to breakdowns that follow a PM.</a:t>
             </a:r>
             <a:endParaRPr lang="en-US" sz="1300" dirty="0"/>
           </a:p>
@@ -8049,7 +8049,7 @@
                 <a:ea typeface="Calibri" pitchFamily="34" charset="-122"/>
                 <a:cs typeface="Calibri" pitchFamily="34" charset="-120"/>
               </a:rPr>
-              <a:t>Curing, Testing, Cap Fitting, Assembly - the four carrying 30.6 of the 34.4 hours (89%).</a:t>
+              <a:t>Curing, Cap Fitting, Testing, Assembly - the four carrying 26.5 of the 28.1 hours (94%).</a:t>
             </a:r>
             <a:endParaRPr lang="en-US" sz="1300" dirty="0"/>
           </a:p>
@@ -8894,7 +8894,7 @@
                           <a:ea typeface="Calibri" pitchFamily="34" charset="-122"/>
                           <a:cs typeface="Calibri" pitchFamily="34" charset="-120"/>
                         </a:rPr>
-                        <a:t>9 of 88</a:t>
+                        <a:t>7 of 88</a:t>
                       </a:r>
                       <a:endParaRPr lang="en-US" sz="1150" dirty="0">
                         <a:latin typeface="Calibri" charset="0"/>
@@ -8962,7 +8962,7 @@
                           <a:ea typeface="Calibri" pitchFamily="34" charset="-122"/>
                           <a:cs typeface="Calibri" pitchFamily="34" charset="-120"/>
                         </a:rPr>
-                        <a:t>Breakdown_Log paired to completed PM_WorkOrder by cell and date</a:t>
+                        <a:t>Breakdown_Log paired to completed PM_WorkOrder, by cell, dated from the last machine scan</a:t>
                       </a:r>
                       <a:endParaRPr lang="en-US" sz="1150" dirty="0">
                         <a:latin typeface="Calibri" charset="0"/>
@@ -9100,7 +9100,7 @@
                           <a:ea typeface="Calibri" pitchFamily="34" charset="-122"/>
                           <a:cs typeface="Calibri" pitchFamily="34" charset="-120"/>
                         </a:rPr>
-                        <a:t>34.4 h  (11.5%)</a:t>
+                        <a:t>28.1 h  (9.4%)</a:t>
                       </a:r>
                       <a:endParaRPr lang="en-US" sz="1150" dirty="0">
                         <a:latin typeface="Calibri" charset="0"/>
@@ -9168,7 +9168,7 @@
                           <a:ea typeface="Calibri" pitchFamily="34" charset="-122"/>
                           <a:cs typeface="Calibri" pitchFamily="34" charset="-120"/>
                         </a:rPr>
-                        <a:t>Same 9 rows, sum of Production_Loss_Min</a:t>
+                        <a:t>Same 7 rows, sum of Production_Loss_Min</a:t>
                       </a:r>
                       <a:endParaRPr lang="en-US" sz="1150" dirty="0">
                         <a:latin typeface="Calibri" charset="0"/>
@@ -9306,7 +9306,7 @@
                           <a:ea typeface="Calibri" pitchFamily="34" charset="-122"/>
                           <a:cs typeface="Calibri" pitchFamily="34" charset="-120"/>
                         </a:rPr>
-                        <a:t>30.6 h  (89%)</a:t>
+                        <a:t>26.5 h  (94%)</a:t>
                       </a:r>
                       <a:endParaRPr lang="en-US" sz="1150" dirty="0">
                         <a:latin typeface="Calibri" charset="0"/>
@@ -9374,7 +9374,7 @@
                           <a:ea typeface="Calibri" pitchFamily="34" charset="-122"/>
                           <a:cs typeface="Calibri" pitchFamily="34" charset="-120"/>
                         </a:rPr>
-                        <a:t>Curing 10.2, Testing 9.0, Cap Fitting 8.4, Assembly 3.0</a:t>
+                        <a:t>Curing 10.2, Cap Fitting 8.4, Testing 4.9, Assembly 3.0</a:t>
                       </a:r>
                       <a:endParaRPr lang="en-US" sz="1150" dirty="0">
                         <a:latin typeface="Calibri" charset="0"/>
@@ -9512,7 +9512,7 @@
                           <a:ea typeface="Calibri" pitchFamily="34" charset="-122"/>
                           <a:cs typeface="Calibri" pitchFamily="34" charset="-120"/>
                         </a:rPr>
-                        <a:t>89.6%  /  48.8%</a:t>
+                        <a:t>89.6%  /  65.1%</a:t>
                       </a:r>
                       <a:endParaRPr lang="en-US" sz="1150" dirty="0">
                         <a:latin typeface="Calibri" charset="0"/>
@@ -9580,7 +9580,7 @@
                           <a:ea typeface="Calibri" pitchFamily="34" charset="-122"/>
                           <a:cs typeface="Calibri" pitchFamily="34" charset="-120"/>
                         </a:rPr>
-                        <a:t>43 of 48 completed; 21 of 43 by the committed date</a:t>
+                        <a:t>43 of 48 completed; 28 of 43 by the committed date</a:t>
                       </a:r>
                       <a:endParaRPr lang="en-US" sz="1150" dirty="0">
                         <a:latin typeface="Calibri" charset="0"/>
